--- a/docs/05_presentation/Kounter_iQOO_Hackathon_2026.pptx
+++ b/docs/05_presentation/Kounter_iQOO_Hackathon_2026.pptx
@@ -2263,7 +2263,7 @@
       </p:grpSpPr>
       <p:pic>
         <p:nvPicPr>
-          <p:cNvPr id="2" name="Image 0" descr="hk_mark_white.png">    </p:cNvPr>
+          <p:cNvPr id="2" name="Image 0" descr="C:\MY\MYPROJECTS\KiranaRakshak\docs\05_presentation\img\hk_mark_white.png">    </p:cNvPr>
           <p:cNvPicPr>
             <a:picLocks noChangeAspect="1"/>
           </p:cNvPicPr>
@@ -2383,7 +2383,7 @@
       </p:sp>
       <p:pic>
         <p:nvPicPr>
-          <p:cNvPr id="5" name="Image 1" descr="app_icon.png">    </p:cNvPr>
+          <p:cNvPr id="5" name="Image 1" descr="C:\MY\MYPROJECTS\KiranaRakshak\docs\05_presentation\img\app_icon.png">    </p:cNvPr>
           <p:cNvPicPr>
             <a:picLocks noChangeAspect="1"/>
           </p:cNvPicPr>
@@ -2413,8 +2413,8 @@
         </p:nvSpPr>
         <p:spPr>
           <a:xfrm>
-            <a:off x="548640" y="3063240"/>
-            <a:ext cx="6858000" cy="1234440"/>
+            <a:off x="548640" y="3291840"/>
+            <a:ext cx="6858000" cy="1097280"/>
           </a:xfrm>
           <a:prstGeom prst="rect">
             <a:avLst/>
@@ -2446,7 +2446,7 @@
       </p:sp>
       <p:sp>
         <p:nvSpPr>
-          <p:cNvPr id="8" name="Text 4"/>
+          <p:cNvPr id="7" name="Text 3"/>
           <p:cNvSpPr txBox="1"/>
           <p:nvPr/>
         </p:nvSpPr>
@@ -2485,7 +2485,7 @@
       </p:sp>
       <p:sp>
         <p:nvSpPr>
-          <p:cNvPr id="9" name="Shape 5"/>
+          <p:cNvPr id="8" name="Shape 4"/>
           <p:cNvSpPr/>
           <p:nvPr/>
         </p:nvSpPr>
@@ -2512,7 +2512,7 @@
       </p:sp>
       <p:sp>
         <p:nvSpPr>
-          <p:cNvPr id="10" name="Text 6"/>
+          <p:cNvPr id="9" name="Text 5"/>
           <p:cNvSpPr txBox="1"/>
           <p:nvPr/>
         </p:nvSpPr>
@@ -2568,7 +2568,7 @@
       </p:sp>
       <p:sp>
         <p:nvSpPr>
-          <p:cNvPr id="11" name="Text 7"/>
+          <p:cNvPr id="10" name="Text 6"/>
           <p:cNvSpPr txBox="1"/>
           <p:nvPr/>
         </p:nvSpPr>
@@ -2641,7 +2641,7 @@
       </p:sp>
       <p:sp>
         <p:nvSpPr>
-          <p:cNvPr id="12" name="Shape 8"/>
+          <p:cNvPr id="11" name="Shape 7"/>
           <p:cNvSpPr/>
           <p:nvPr/>
         </p:nvSpPr>
@@ -2670,7 +2670,7 @@
       </p:sp>
       <p:sp>
         <p:nvSpPr>
-          <p:cNvPr id="13" name="Shape 9"/>
+          <p:cNvPr id="12" name="Shape 8"/>
           <p:cNvSpPr/>
           <p:nvPr/>
         </p:nvSpPr>
@@ -2699,7 +2699,7 @@
       </p:sp>
       <p:pic>
         <p:nvPicPr>
-          <p:cNvPr id="14" name="Image 2" descr="vendor-bill.png">    </p:cNvPr>
+          <p:cNvPr id="13" name="Image 2" descr="C:\MY\MYPROJECTS\KiranaRakshak\docs\05_presentation\img\vendor-bill.png">    </p:cNvPr>
           <p:cNvPicPr>
             <a:picLocks noChangeAspect="1"/>
           </p:cNvPicPr>
@@ -2730,7 +2730,7 @@
       </p:pic>
       <p:pic>
         <p:nvPicPr>
-          <p:cNvPr id="15" name="Image 3" descr="home.png">    </p:cNvPr>
+          <p:cNvPr id="14" name="Image 3" descr="C:\MY\MYPROJECTS\KiranaRakshak\docs\05_presentation\img\home.png">    </p:cNvPr>
           <p:cNvPicPr>
             <a:picLocks noChangeAspect="1"/>
           </p:cNvPicPr>
@@ -2761,7 +2761,7 @@
       </p:pic>
       <p:sp>
         <p:nvSpPr>
-          <p:cNvPr id="16" name="Shape 10"/>
+          <p:cNvPr id="15" name="Shape 9"/>
           <p:cNvSpPr/>
           <p:nvPr/>
         </p:nvSpPr>
@@ -2788,7 +2788,7 @@
       </p:sp>
       <p:sp>
         <p:nvSpPr>
-          <p:cNvPr id="17" name="Text 11"/>
+          <p:cNvPr id="16" name="Text 10"/>
           <p:cNvSpPr txBox="1"/>
           <p:nvPr/>
         </p:nvSpPr>
@@ -2827,7 +2827,7 @@
       </p:sp>
       <p:sp>
         <p:nvSpPr>
-          <p:cNvPr id="18" name="Shape 12"/>
+          <p:cNvPr id="17" name="Shape 11"/>
           <p:cNvSpPr/>
           <p:nvPr/>
         </p:nvSpPr>
@@ -2854,7 +2854,7 @@
       </p:sp>
       <p:sp>
         <p:nvSpPr>
-          <p:cNvPr id="19" name="Text 13"/>
+          <p:cNvPr id="18" name="Text 12"/>
           <p:cNvSpPr txBox="1"/>
           <p:nvPr/>
         </p:nvSpPr>
@@ -2925,7 +2925,7 @@
       </p:grpSpPr>
       <p:pic>
         <p:nvPicPr>
-          <p:cNvPr id="2" name="Image 0" descr="iqoo_white.png">    </p:cNvPr>
+          <p:cNvPr id="2" name="Image 0" descr="C:\MY\MYPROJECTS\KiranaRakshak\docs\05_presentation\img\iqoo_white.png">    </p:cNvPr>
           <p:cNvPicPr>
             <a:picLocks noChangeAspect="1"/>
           </p:cNvPicPr>
@@ -4598,7 +4598,7 @@
       </p:grpSpPr>
       <p:pic>
         <p:nvPicPr>
-          <p:cNvPr id="2" name="Image 0" descr="iqoo_black.png">    </p:cNvPr>
+          <p:cNvPr id="2" name="Image 0" descr="C:\MY\MYPROJECTS\KiranaRakshak\docs\05_presentation\img\iqoo_black.png">    </p:cNvPr>
           <p:cNvPicPr>
             <a:picLocks noChangeAspect="1"/>
           </p:cNvPicPr>
@@ -4941,7 +4941,7 @@
                 <a:ea typeface="Arial Black" pitchFamily="34" charset="-122"/>
                 <a:cs typeface="Arial Black" pitchFamily="34" charset="-120"/>
               </a:rPr>
-              <a:t>&lt; 250 ms</a:t>
+              <a:t>&lt; 300 ms</a:t>
             </a:r>
             <a:endParaRPr lang="en-US" sz="3000" dirty="0"/>
           </a:p>
@@ -5324,7 +5324,7 @@
       </p:grpSpPr>
       <p:pic>
         <p:nvPicPr>
-          <p:cNvPr id="2" name="Image 0" descr="iqoo_white.png">    </p:cNvPr>
+          <p:cNvPr id="2" name="Image 0" descr="C:\MY\MYPROJECTS\KiranaRakshak\docs\05_presentation\img\iqoo_white.png">    </p:cNvPr>
           <p:cNvPicPr>
             <a:picLocks noChangeAspect="1"/>
           </p:cNvPicPr>
@@ -5457,7 +5457,7 @@
                 <a:ea typeface="Arial" pitchFamily="34" charset="-122"/>
                 <a:cs typeface="Arial" pitchFamily="34" charset="-120"/>
               </a:rPr>
-              <a:t>48-HOUR EXECUTION PLAN · FRI EVENING → SUN EVENING</a:t>
+              <a:t>30-HOUR EXECUTION PLAN · RED LIGHT → GREEN LIGHT → FINALE</a:t>
             </a:r>
             <a:endParaRPr lang="en-US" sz="1100" dirty="0"/>
           </a:p>
@@ -5583,7 +5583,7 @@
                 <a:ea typeface="Arial Black" pitchFamily="34" charset="-122"/>
                 <a:cs typeface="Arial Black" pitchFamily="34" charset="-120"/>
               </a:rPr>
-              <a:t>0–12 h</a:t>
+              <a:t>0–10 h</a:t>
             </a:r>
             <a:endParaRPr lang="en-US" sz="1600" dirty="0"/>
           </a:p>
@@ -5752,7 +5752,7 @@
                 <a:ea typeface="Arial Black" pitchFamily="34" charset="-122"/>
                 <a:cs typeface="Arial Black" pitchFamily="34" charset="-120"/>
               </a:rPr>
-              <a:t>12–22 h</a:t>
+              <a:t>10–16 h</a:t>
             </a:r>
             <a:endParaRPr lang="en-US" sz="1600" dirty="0"/>
           </a:p>
@@ -5818,7 +5818,7 @@
                 <a:ea typeface="Arial" pitchFamily="34" charset="-122"/>
                 <a:cs typeface="Arial" pitchFamily="34" charset="-120"/>
               </a:rPr>
-              <a:t>Sensors</a:t>
+              <a:t>Sensors &amp; haptics</a:t>
             </a:r>
             <a:endParaRPr lang="en-US" sz="1400" dirty="0"/>
           </a:p>
@@ -5857,7 +5857,7 @@
                 <a:ea typeface="Arial" pitchFamily="34" charset="-122"/>
                 <a:cs typeface="Arial" pitchFamily="34" charset="-120"/>
               </a:rPr>
-              <a:t>Colour-spectrum anti-banding, IR transmitter, NFC tap-in, NavIC geotag</a:t>
+              <a:t>Colour-spectrum anti-banding, IR transmitter, NFC tap-in, NavIC geotag, expiry haptics</a:t>
             </a:r>
             <a:endParaRPr lang="en-US" sz="1100" dirty="0"/>
           </a:p>
@@ -5921,7 +5921,7 @@
                 <a:ea typeface="Arial Black" pitchFamily="34" charset="-122"/>
                 <a:cs typeface="Arial Black" pitchFamily="34" charset="-120"/>
               </a:rPr>
-              <a:t>22–32 h</a:t>
+              <a:t>16–20 h</a:t>
             </a:r>
             <a:endParaRPr lang="en-US" sz="1600" dirty="0"/>
           </a:p>
@@ -5987,7 +5987,7 @@
                 <a:ea typeface="Arial" pitchFamily="34" charset="-122"/>
                 <a:cs typeface="Arial" pitchFamily="34" charset="-120"/>
               </a:rPr>
-              <a:t>Voice &amp; haptics</a:t>
+              <a:t>Voice</a:t>
             </a:r>
             <a:endParaRPr lang="en-US" sz="1400" dirty="0"/>
           </a:p>
@@ -6026,7 +6026,7 @@
                 <a:ea typeface="Arial" pitchFamily="34" charset="-122"/>
                 <a:cs typeface="Arial" pitchFamily="34" charset="-120"/>
               </a:rPr>
-              <a:t>Whisper STT, Laya intent → SQL, custom haptic waveforms</a:t>
+              <a:t>Whisper STT, Laya intent → SQL, Hindi answers on the stereo speakers</a:t>
             </a:r>
             <a:endParaRPr lang="en-US" sz="1100" dirty="0"/>
           </a:p>
@@ -6090,7 +6090,7 @@
                 <a:ea typeface="Arial Black" pitchFamily="34" charset="-122"/>
                 <a:cs typeface="Arial Black" pitchFamily="34" charset="-120"/>
               </a:rPr>
-              <a:t>32–40 h</a:t>
+              <a:t>20–25 h</a:t>
             </a:r>
             <a:endParaRPr lang="en-US" sz="1600" dirty="0"/>
           </a:p>
@@ -6195,7 +6195,7 @@
                 <a:ea typeface="Arial" pitchFamily="34" charset="-122"/>
                 <a:cs typeface="Arial" pitchFamily="34" charset="-120"/>
               </a:rPr>
-              <a:t>Customer display via Presentation API, dashboard, Excel export</a:t>
+              <a:t>Customer display via Presentation API, vendor ledger sync, Excel export</a:t>
             </a:r>
             <a:endParaRPr lang="en-US" sz="1100" dirty="0"/>
           </a:p>
@@ -6259,7 +6259,7 @@
                 <a:ea typeface="Arial Black" pitchFamily="34" charset="-122"/>
                 <a:cs typeface="Arial Black" pitchFamily="34" charset="-120"/>
               </a:rPr>
-              <a:t>40–48 h</a:t>
+              <a:t>25–30 h</a:t>
             </a:r>
             <a:endParaRPr lang="en-US" sz="1600" dirty="0"/>
           </a:p>
@@ -6364,7 +6364,7 @@
                 <a:ea typeface="Arial" pitchFamily="34" charset="-122"/>
                 <a:cs typeface="Arial" pitchFamily="34" charset="-120"/>
               </a:rPr>
-              <a:t>Props, lighting calibration, 3–5 minute pitch rehearsal</a:t>
+              <a:t>Props, lighting calibration, rehearsal of the 3–5 minute pitch</a:t>
             </a:r>
             <a:endParaRPr lang="en-US" sz="1100" dirty="0"/>
           </a:p>
@@ -6403,7 +6403,7 @@
                 <a:ea typeface="Arial" pitchFamily="34" charset="-122"/>
                 <a:cs typeface="Arial" pitchFamily="34" charset="-120"/>
               </a:rPr>
-              <a:t>Already done: clickable prototype of every screen + showcase website.</a:t>
+              <a:t>Already done: clickable bilingual prototype of every screen + scroll-driven showcase website (Vercel routes / and /app).</a:t>
             </a:r>
             <a:endParaRPr lang="en-US" sz="1300" dirty="0"/>
           </a:p>
@@ -6472,7 +6472,7 @@
       </p:sp>
       <p:pic>
         <p:nvPicPr>
-          <p:cNvPr id="3" name="Image 0" descr="hk_mark_white.png">    </p:cNvPr>
+          <p:cNvPr id="3" name="Image 0" descr="C:\MY\MYPROJECTS\KiranaRakshak\docs\05_presentation\img\hk_mark_white.png">    </p:cNvPr>
           <p:cNvPicPr>
             <a:picLocks noChangeAspect="1"/>
           </p:cNvPicPr>
@@ -6725,7 +6725,7 @@
       </p:sp>
       <p:pic>
         <p:nvPicPr>
-          <p:cNvPr id="9" name="Image 1" descr="app_icon.png">    </p:cNvPr>
+          <p:cNvPr id="9" name="Image 1" descr="C:\MY\MYPROJECTS\KiranaRakshak\docs\05_presentation\img\app_icon.png">    </p:cNvPr>
           <p:cNvPicPr>
             <a:picLocks noChangeAspect="1"/>
           </p:cNvPicPr>
@@ -6820,7 +6820,7 @@
       </p:grpSpPr>
       <p:pic>
         <p:nvPicPr>
-          <p:cNvPr id="2" name="Image 0" descr="iqoo_white.png">    </p:cNvPr>
+          <p:cNvPr id="2" name="Image 0" descr="C:\MY\MYPROJECTS\KiranaRakshak\docs\05_presentation\img\iqoo_white.png">    </p:cNvPr>
           <p:cNvPicPr>
             <a:picLocks noChangeAspect="1"/>
           </p:cNvPicPr>
@@ -7947,7 +7947,7 @@
       </p:grpSpPr>
       <p:pic>
         <p:nvPicPr>
-          <p:cNvPr id="2" name="Image 0" descr="iqoo_white.png">    </p:cNvPr>
+          <p:cNvPr id="2" name="Image 0" descr="C:\MY\MYPROJECTS\KiranaRakshak\docs\05_presentation\img\iqoo_white.png">    </p:cNvPr>
           <p:cNvPicPr>
             <a:picLocks noChangeAspect="1"/>
           </p:cNvPicPr>
@@ -8939,7 +8939,7 @@
       </p:grpSpPr>
       <p:pic>
         <p:nvPicPr>
-          <p:cNvPr id="2" name="Image 0" descr="iqoo_black.png">    </p:cNvPr>
+          <p:cNvPr id="2" name="Image 0" descr="C:\MY\MYPROJECTS\KiranaRakshak\docs\05_presentation\img\iqoo_black.png">    </p:cNvPr>
           <p:cNvPicPr>
             <a:picLocks noChangeAspect="1"/>
           </p:cNvPicPr>
@@ -9119,7 +9119,7 @@
       </p:sp>
       <p:pic>
         <p:nvPicPr>
-          <p:cNvPr id="7" name="Image 1" descr="home.png">    </p:cNvPr>
+          <p:cNvPr id="7" name="Image 1" descr="C:\MY\MYPROJECTS\KiranaRakshak\docs\05_presentation\img\home.png">    </p:cNvPr>
           <p:cNvPicPr>
             <a:picLocks noChangeAspect="1"/>
           </p:cNvPicPr>
@@ -9267,7 +9267,7 @@
       </p:sp>
       <p:pic>
         <p:nvPicPr>
-          <p:cNvPr id="11" name="Image 2" descr="vendor-scan.png">    </p:cNvPr>
+          <p:cNvPr id="11" name="Image 2" descr="C:\MY\MYPROJECTS\KiranaRakshak\docs\05_presentation\img\vendor-scan.png">    </p:cNvPr>
           <p:cNvPicPr>
             <a:picLocks noChangeAspect="1"/>
           </p:cNvPicPr>
@@ -9415,7 +9415,7 @@
       </p:sp>
       <p:pic>
         <p:nvPicPr>
-          <p:cNvPr id="15" name="Image 3" descr="vendor-bill.png">    </p:cNvPr>
+          <p:cNvPr id="15" name="Image 3" descr="C:\MY\MYPROJECTS\KiranaRakshak\docs\05_presentation\img\vendor-bill.png">    </p:cNvPr>
           <p:cNvPicPr>
             <a:picLocks noChangeAspect="1"/>
           </p:cNvPicPr>
@@ -9634,7 +9634,7 @@
       </p:grpSpPr>
       <p:pic>
         <p:nvPicPr>
-          <p:cNvPr id="2" name="Image 0" descr="iqoo_white.png">    </p:cNvPr>
+          <p:cNvPr id="2" name="Image 0" descr="C:\MY\MYPROJECTS\KiranaRakshak\docs\05_presentation\img\iqoo_white.png">    </p:cNvPr>
           <p:cNvPicPr>
             <a:picLocks noChangeAspect="1"/>
           </p:cNvPicPr>
@@ -9814,7 +9814,7 @@
       </p:sp>
       <p:pic>
         <p:nvPicPr>
-          <p:cNvPr id="7" name="Image 1" descr="sell.png">    </p:cNvPr>
+          <p:cNvPr id="7" name="Image 1" descr="C:\MY\MYPROJECTS\KiranaRakshak\docs\05_presentation\img\sell.png">    </p:cNvPr>
           <p:cNvPicPr>
             <a:picLocks noChangeAspect="1"/>
           </p:cNvPicPr>
@@ -9845,7 +9845,7 @@
       </p:pic>
       <p:pic>
         <p:nvPicPr>
-          <p:cNvPr id="8" name="Image 2" descr="assistant.png">    </p:cNvPr>
+          <p:cNvPr id="8" name="Image 2" descr="C:\MY\MYPROJECTS\KiranaRakshak\docs\05_presentation\img\assistant.png">    </p:cNvPr>
           <p:cNvPicPr>
             <a:picLocks noChangeAspect="1"/>
           </p:cNvPicPr>
@@ -10416,7 +10416,7 @@
       </p:grpSpPr>
       <p:pic>
         <p:nvPicPr>
-          <p:cNvPr id="2" name="Image 0" descr="iqoo_white.png">    </p:cNvPr>
+          <p:cNvPr id="2" name="Image 0" descr="C:\MY\MYPROJECTS\KiranaRakshak\docs\05_presentation\img\iqoo_white.png">    </p:cNvPr>
           <p:cNvPicPr>
             <a:picLocks noChangeAspect="1"/>
           </p:cNvPicPr>
@@ -12229,7 +12229,7 @@
       </p:grpSpPr>
       <p:pic>
         <p:nvPicPr>
-          <p:cNvPr id="2" name="Image 0" descr="iqoo_black.png">    </p:cNvPr>
+          <p:cNvPr id="2" name="Image 0" descr="C:\MY\MYPROJECTS\KiranaRakshak\docs\05_presentation\img\iqoo_black.png">    </p:cNvPr>
           <p:cNvPicPr>
             <a:picLocks noChangeAspect="1"/>
           </p:cNvPicPr>
@@ -12409,7 +12409,7 @@
       </p:sp>
       <p:pic>
         <p:nvPicPr>
-          <p:cNvPr id="7" name="Image 1" descr="iqoo_black.png">    </p:cNvPr>
+          <p:cNvPr id="7" name="Image 1" descr="C:\MY\MYPROJECTS\KiranaRakshak\docs\05_presentation\img\iqoo_black.png">    </p:cNvPr>
           <p:cNvPicPr>
             <a:picLocks noChangeAspect="1"/>
           </p:cNvPicPr>
@@ -13977,7 +13977,7 @@
       </p:grpSpPr>
       <p:pic>
         <p:nvPicPr>
-          <p:cNvPr id="2" name="Image 0" descr="iqoo_white.png">    </p:cNvPr>
+          <p:cNvPr id="2" name="Image 0" descr="C:\MY\MYPROJECTS\KiranaRakshak\docs\05_presentation\img\iqoo_white.png">    </p:cNvPr>
           <p:cNvPicPr>
             <a:picLocks noChangeAspect="1"/>
           </p:cNvPicPr>
@@ -14149,7 +14149,7 @@
                 <a:ea typeface="Arial Black" pitchFamily="34" charset="-122"/>
                 <a:cs typeface="Arial Black" pitchFamily="34" charset="-120"/>
               </a:rPr>
-              <a:t>Photo in, verdict out — in under 250 ms.</a:t>
+              <a:t>Photo in, verdict out — in under 300 ms.</a:t>
             </a:r>
             <a:endParaRPr lang="en-US" sz="3400" dirty="0"/>
           </a:p>
@@ -15578,7 +15578,7 @@
       </p:grpSpPr>
       <p:pic>
         <p:nvPicPr>
-          <p:cNvPr id="2" name="Image 0" descr="iqoo_white.png">    </p:cNvPr>
+          <p:cNvPr id="2" name="Image 0" descr="C:\MY\MYPROJECTS\KiranaRakshak\docs\05_presentation\img\iqoo_white.png">    </p:cNvPr>
           <p:cNvPicPr>
             <a:picLocks noChangeAspect="1"/>
           </p:cNvPicPr>
